--- a/Advert TEmp(new).pptx
+++ b/Advert TEmp(new).pptx
@@ -246,7 +246,7 @@
           <a:p>
             <a:fld id="{357FCB8E-CCDB-4867-BC8D-8F3C82F59E52}" type="datetimeFigureOut">
               <a:rPr lang="en-US" smtClean="0"/>
-              <a:t>10/8/2026</a:t>
+              <a:t>10/22/2026</a:t>
             </a:fld>
             <a:endParaRPr lang="en-US"/>
           </a:p>
@@ -416,7 +416,7 @@
           <a:p>
             <a:fld id="{357FCB8E-CCDB-4867-BC8D-8F3C82F59E52}" type="datetimeFigureOut">
               <a:rPr lang="en-US" smtClean="0"/>
-              <a:t>10/8/2026</a:t>
+              <a:t>10/22/2026</a:t>
             </a:fld>
             <a:endParaRPr lang="en-US"/>
           </a:p>
@@ -596,7 +596,7 @@
           <a:p>
             <a:fld id="{357FCB8E-CCDB-4867-BC8D-8F3C82F59E52}" type="datetimeFigureOut">
               <a:rPr lang="en-US" smtClean="0"/>
-              <a:t>10/8/2026</a:t>
+              <a:t>10/22/2026</a:t>
             </a:fld>
             <a:endParaRPr lang="en-US"/>
           </a:p>
@@ -766,7 +766,7 @@
           <a:p>
             <a:fld id="{357FCB8E-CCDB-4867-BC8D-8F3C82F59E52}" type="datetimeFigureOut">
               <a:rPr lang="en-US" smtClean="0"/>
-              <a:t>10/8/2026</a:t>
+              <a:t>10/22/2026</a:t>
             </a:fld>
             <a:endParaRPr lang="en-US"/>
           </a:p>
@@ -1012,7 +1012,7 @@
           <a:p>
             <a:fld id="{357FCB8E-CCDB-4867-BC8D-8F3C82F59E52}" type="datetimeFigureOut">
               <a:rPr lang="en-US" smtClean="0"/>
-              <a:t>10/8/2026</a:t>
+              <a:t>10/22/2026</a:t>
             </a:fld>
             <a:endParaRPr lang="en-US"/>
           </a:p>
@@ -1244,7 +1244,7 @@
           <a:p>
             <a:fld id="{357FCB8E-CCDB-4867-BC8D-8F3C82F59E52}" type="datetimeFigureOut">
               <a:rPr lang="en-US" smtClean="0"/>
-              <a:t>10/8/2026</a:t>
+              <a:t>10/22/2026</a:t>
             </a:fld>
             <a:endParaRPr lang="en-US"/>
           </a:p>
@@ -1611,7 +1611,7 @@
           <a:p>
             <a:fld id="{357FCB8E-CCDB-4867-BC8D-8F3C82F59E52}" type="datetimeFigureOut">
               <a:rPr lang="en-US" smtClean="0"/>
-              <a:t>10/8/2026</a:t>
+              <a:t>10/22/2026</a:t>
             </a:fld>
             <a:endParaRPr lang="en-US"/>
           </a:p>
@@ -1729,7 +1729,7 @@
           <a:p>
             <a:fld id="{357FCB8E-CCDB-4867-BC8D-8F3C82F59E52}" type="datetimeFigureOut">
               <a:rPr lang="en-US" smtClean="0"/>
-              <a:t>10/8/2026</a:t>
+              <a:t>10/22/2026</a:t>
             </a:fld>
             <a:endParaRPr lang="en-US"/>
           </a:p>
@@ -1824,7 +1824,7 @@
           <a:p>
             <a:fld id="{357FCB8E-CCDB-4867-BC8D-8F3C82F59E52}" type="datetimeFigureOut">
               <a:rPr lang="en-US" smtClean="0"/>
-              <a:t>10/8/2026</a:t>
+              <a:t>10/22/2026</a:t>
             </a:fld>
             <a:endParaRPr lang="en-US"/>
           </a:p>
@@ -2101,7 +2101,7 @@
           <a:p>
             <a:fld id="{357FCB8E-CCDB-4867-BC8D-8F3C82F59E52}" type="datetimeFigureOut">
               <a:rPr lang="en-US" smtClean="0"/>
-              <a:t>10/8/2026</a:t>
+              <a:t>10/22/2026</a:t>
             </a:fld>
             <a:endParaRPr lang="en-US"/>
           </a:p>
@@ -2354,7 +2354,7 @@
           <a:p>
             <a:fld id="{357FCB8E-CCDB-4867-BC8D-8F3C82F59E52}" type="datetimeFigureOut">
               <a:rPr lang="en-US" smtClean="0"/>
-              <a:t>10/8/2026</a:t>
+              <a:t>10/22/2026</a:t>
             </a:fld>
             <a:endParaRPr lang="en-US"/>
           </a:p>
@@ -2567,7 +2567,7 @@
           <a:p>
             <a:fld id="{357FCB8E-CCDB-4867-BC8D-8F3C82F59E52}" type="datetimeFigureOut">
               <a:rPr lang="en-US" smtClean="0"/>
-              <a:t>10/8/2026</a:t>
+              <a:t>10/22/2026</a:t>
             </a:fld>
             <a:endParaRPr lang="en-US"/>
           </a:p>
@@ -5425,8 +5425,8 @@
         </p:nvSpPr>
         <p:spPr bwMode="auto">
           <a:xfrm>
-            <a:off x="2627136" y="1060980"/>
-            <a:ext cx="7175500" cy="4500562"/>
+            <a:off x="1684601" y="1060980"/>
+            <a:ext cx="8118035" cy="5667198"/>
           </a:xfrm>
           <a:prstGeom prst="rect">
             <a:avLst/>
